--- a/reports/turn-in/presentation/presentation.pptx
+++ b/reports/turn-in/presentation/presentation.pptx
@@ -24,6 +24,9 @@
     <p:sldId id="272" r:id="rId24"/>
     <p:sldId id="273" r:id="rId25"/>
     <p:sldId id="274" r:id="rId26"/>
+    <p:sldId id="275" r:id="rId27"/>
+    <p:sldId id="276" r:id="rId28"/>
+    <p:sldId id="277" r:id="rId29"/>
   </p:sldIdLst>
   <p:sldSz cx="9144000" cy="6858000" type="screen4x3"/>
   <p:notesSz cx="6858000" cy="9144000"/>
@@ -660,7 +663,7 @@
           <a:lstStyle/>
           <a:p>
             <a:r>
-              <a:t>This also satisfies the "sensors" element of the ME472 course prompt. The DIAG signal path is hardware-speed detection that survives the 250ms poll gap.</a:t>
+              <a:t>This slide exists because software rigor is *the* distinguishing evidence of engineering in a project where most hardware hasn't arrived yet. If asked "how do you know this works?" — the answer is here. The firmware CI is what catches regressions if upstream Klipper reshapes rp2040/main.c between now and submission.</a:t>
             </a:r>
           </a:p>
         </p:txBody>
@@ -730,7 +733,7 @@
           <a:lstStyle/>
           <a:p>
             <a:r>
-              <a:t>All software testing is mock-based — 479 tests run in 1.5s with zero hardware. Hardware-dependent tests wait on the motor/pump delivery.</a:t>
+              <a:t>This also satisfies the "sensors" element of the ME472 course prompt. The DIAG signal path is hardware-speed detection that survives the 250ms poll gap.</a:t>
             </a:r>
           </a:p>
         </p:txBody>
@@ -800,7 +803,7 @@
           <a:lstStyle/>
           <a:p>
             <a:r>
-              <a:t>Hedge honestly — we have a fully validated software stack, a detailed electrical design, and a stretch-goal firmware overlay that's written and unit-tested, but we don't yet have measured latency numbers on the real motor.</a:t>
+              <a:t>All software testing is mock-based — 479 tests run in 1.5s with zero hardware. Hardware-dependent tests wait on the motor/pump delivery.</a:t>
             </a:r>
           </a:p>
         </p:txBody>
@@ -870,7 +873,7 @@
           <a:lstStyle/>
           <a:p>
             <a:r>
-              <a:t>The Bolton iteration is a feature, not a defect. We wrote about this explicitly in Section H of the report — the specification is better for having been revised.</a:t>
+              <a:t>Placeholder slide — the two PNGs from scripts/report_figures.py drop in here after Wednesday's bringup. Target layout is two figures side-by-side, bullets summarizing below. If latency misses spec, own it; Phase 4 is about learning what the real system does, not ratifying the prediction.</a:t>
             </a:r>
           </a:p>
         </p:txBody>
@@ -940,7 +943,7 @@
           <a:lstStyle/>
           <a:p>
             <a:r>
-              <a:t>The capstone ends April 23, but the project has a life beyond — particularly the multi-material and URCap work that a future team could pick up.</a:t>
+              <a:t>Hedge honestly — we have a fully validated software stack, a detailed electrical design, and a stretch-goal firmware overlay that's written and unit-tested, but we don't yet have measured latency numbers on the real motor.</a:t>
             </a:r>
           </a:p>
         </p:txBody>
@@ -1010,7 +1013,217 @@
           <a:lstStyle/>
           <a:p>
             <a:r>
+              <a:t>The Bolton iteration is a feature, not a defect. We wrote about this explicitly in Section H of the report — the specification is better for having been revised.</a:t>
+            </a:r>
+          </a:p>
+        </p:txBody>
+      </p:sp>
+      <p:sp>
+        <p:nvSpPr>
+          <p:cNvPr id="4" name="Slide Number Placeholder 3"/>
+          <p:cNvSpPr>
+            <a:spLocks noGrp="1"/>
+          </p:cNvSpPr>
+          <p:nvPr>
+            <p:ph type="sldNum" idx="5" sz="quarter"/>
+          </p:nvPr>
+        </p:nvSpPr>
+        <p:spPr/>
+      </p:sp>
+    </p:spTree>
+  </p:cSld>
+  <p:clrMapOvr>
+    <a:masterClrMapping/>
+  </p:clrMapOvr>
+</p:notes>
+</file>
+
+<file path=ppt/notesSlides/notesSlide17.xml><?xml version="1.0" encoding="utf-8"?>
+<p:notes xmlns:a="http://schemas.openxmlformats.org/drawingml/2006/main" xmlns:p="http://schemas.openxmlformats.org/presentationml/2006/main" xmlns:r="http://schemas.openxmlformats.org/officeDocument/2006/relationships">
+  <p:cSld>
+    <p:spTree>
+      <p:nvGrpSpPr>
+        <p:cNvPr id="1" name=""/>
+        <p:cNvGrpSpPr/>
+        <p:nvPr/>
+      </p:nvGrpSpPr>
+      <p:grpSpPr>
+        <a:xfrm>
+          <a:off x="0" y="0"/>
+          <a:ext cx="0" cy="0"/>
+          <a:chOff x="0" y="0"/>
+          <a:chExt cx="0" cy="0"/>
+        </a:xfrm>
+      </p:grpSpPr>
+      <p:sp>
+        <p:nvSpPr>
+          <p:cNvPr id="2" name="Slide Image Placeholder 1"/>
+          <p:cNvSpPr>
+            <a:spLocks noGrp="1"/>
+          </p:cNvSpPr>
+          <p:nvPr>
+            <p:ph type="sldImg" idx="2"/>
+          </p:nvPr>
+        </p:nvSpPr>
+        <p:spPr/>
+      </p:sp>
+      <p:sp>
+        <p:nvSpPr>
+          <p:cNvPr id="3" name="Notes Placeholder 2"/>
+          <p:cNvSpPr>
+            <a:spLocks noGrp="1"/>
+          </p:cNvSpPr>
+          <p:nvPr>
+            <p:ph type="body" idx="3" sz="quarter"/>
+          </p:nvPr>
+        </p:nvSpPr>
+        <p:spPr/>
+        <p:txBody>
+          <a:bodyPr/>
+          <a:lstStyle/>
+          <a:p>
+            <a:r>
+              <a:t>The capstone ends April 23, but the project has a life beyond — particularly the multi-material and URCap work that a future team could pick up.</a:t>
+            </a:r>
+          </a:p>
+        </p:txBody>
+      </p:sp>
+      <p:sp>
+        <p:nvSpPr>
+          <p:cNvPr id="4" name="Slide Number Placeholder 3"/>
+          <p:cNvSpPr>
+            <a:spLocks noGrp="1"/>
+          </p:cNvSpPr>
+          <p:nvPr>
+            <p:ph type="sldNum" idx="5" sz="quarter"/>
+          </p:nvPr>
+        </p:nvSpPr>
+        <p:spPr/>
+      </p:sp>
+    </p:spTree>
+  </p:cSld>
+  <p:clrMapOvr>
+    <a:masterClrMapping/>
+  </p:clrMapOvr>
+</p:notes>
+</file>
+
+<file path=ppt/notesSlides/notesSlide18.xml><?xml version="1.0" encoding="utf-8"?>
+<p:notes xmlns:a="http://schemas.openxmlformats.org/drawingml/2006/main" xmlns:p="http://schemas.openxmlformats.org/presentationml/2006/main" xmlns:r="http://schemas.openxmlformats.org/officeDocument/2006/relationships">
+  <p:cSld>
+    <p:spTree>
+      <p:nvGrpSpPr>
+        <p:cNvPr id="1" name=""/>
+        <p:cNvGrpSpPr/>
+        <p:nvPr/>
+      </p:nvGrpSpPr>
+      <p:grpSpPr>
+        <a:xfrm>
+          <a:off x="0" y="0"/>
+          <a:ext cx="0" cy="0"/>
+          <a:chOff x="0" y="0"/>
+          <a:chExt cx="0" cy="0"/>
+        </a:xfrm>
+      </p:grpSpPr>
+      <p:sp>
+        <p:nvSpPr>
+          <p:cNvPr id="2" name="Slide Image Placeholder 1"/>
+          <p:cNvSpPr>
+            <a:spLocks noGrp="1"/>
+          </p:cNvSpPr>
+          <p:nvPr>
+            <p:ph type="sldImg" idx="2"/>
+          </p:nvPr>
+        </p:nvSpPr>
+        <p:spPr/>
+      </p:sp>
+      <p:sp>
+        <p:nvSpPr>
+          <p:cNvPr id="3" name="Notes Placeholder 2"/>
+          <p:cNvSpPr>
+            <a:spLocks noGrp="1"/>
+          </p:cNvSpPr>
+          <p:nvPr>
+            <p:ph type="body" idx="3" sz="quarter"/>
+          </p:nvPr>
+        </p:nvSpPr>
+        <p:spPr/>
+        <p:txBody>
+          <a:bodyPr/>
+          <a:lstStyle/>
+          <a:p>
+            <a:r>
               <a:t>Leave 2-3 minutes for Q&amp;A. Likely question topics: latency measurement methodology, why Klipper over ROS/custom, metal paste specifics (defer to instructor-provided info), safety story under fault conditions.</a:t>
+            </a:r>
+          </a:p>
+        </p:txBody>
+      </p:sp>
+      <p:sp>
+        <p:nvSpPr>
+          <p:cNvPr id="4" name="Slide Number Placeholder 3"/>
+          <p:cNvSpPr>
+            <a:spLocks noGrp="1"/>
+          </p:cNvSpPr>
+          <p:nvPr>
+            <p:ph type="sldNum" idx="5" sz="quarter"/>
+          </p:nvPr>
+        </p:nvSpPr>
+        <p:spPr/>
+      </p:sp>
+    </p:spTree>
+  </p:cSld>
+  <p:clrMapOvr>
+    <a:masterClrMapping/>
+  </p:clrMapOvr>
+</p:notes>
+</file>
+
+<file path=ppt/notesSlides/notesSlide19.xml><?xml version="1.0" encoding="utf-8"?>
+<p:notes xmlns:a="http://schemas.openxmlformats.org/drawingml/2006/main" xmlns:p="http://schemas.openxmlformats.org/presentationml/2006/main" xmlns:r="http://schemas.openxmlformats.org/officeDocument/2006/relationships">
+  <p:cSld>
+    <p:spTree>
+      <p:nvGrpSpPr>
+        <p:cNvPr id="1" name=""/>
+        <p:cNvGrpSpPr/>
+        <p:nvPr/>
+      </p:nvGrpSpPr>
+      <p:grpSpPr>
+        <a:xfrm>
+          <a:off x="0" y="0"/>
+          <a:ext cx="0" cy="0"/>
+          <a:chOff x="0" y="0"/>
+          <a:chExt cx="0" cy="0"/>
+        </a:xfrm>
+      </p:grpSpPr>
+      <p:sp>
+        <p:nvSpPr>
+          <p:cNvPr id="2" name="Slide Image Placeholder 1"/>
+          <p:cNvSpPr>
+            <a:spLocks noGrp="1"/>
+          </p:cNvSpPr>
+          <p:nvPr>
+            <p:ph type="sldImg" idx="2"/>
+          </p:nvPr>
+        </p:nvSpPr>
+        <p:spPr/>
+      </p:sp>
+      <p:sp>
+        <p:nvSpPr>
+          <p:cNvPr id="3" name="Notes Placeholder 2"/>
+          <p:cNvSpPr>
+            <a:spLocks noGrp="1"/>
+          </p:cNvSpPr>
+          <p:nvPr>
+            <p:ph type="body" idx="3" sz="quarter"/>
+          </p:nvPr>
+        </p:nvSpPr>
+        <p:spPr/>
+        <p:txBody>
+          <a:bodyPr/>
+          <a:lstStyle/>
+          <a:p>
+            <a:r>
+              <a:t>This is the "defense in depth" backup slide. Q&amp;A magnet for "what if X fails" questions. Each row has a concrete handler — pointable to a file:line in the codebase. If pressed, cite docs/design/hitl_plan.md for the full fault matrix.</a:t>
             </a:r>
           </a:p>
         </p:txBody>
@@ -1570,7 +1783,7 @@
           <a:lstStyle/>
           <a:p>
             <a:r>
-              <a:t>Single-threaded, synchronous by design — predictable timing beats throughput. Stateless translator between two async systems. All 479 tests run in ~1.5s, no hardware needed.</a:t>
+              <a:t>Single-threaded, synchronous by design — predictable timing beats throughput. Stateless translator between two async systems. All 479 tests run in ~1.5s, no hardware needed. Figures 2/5/6 live in reports/turn-in/report/figures/ — paste fig5 (components) as main visual, reference fig6 (state machine) in Q&amp;A if asked how fault recovery works.</a:t>
             </a:r>
           </a:p>
         </p:txBody>
@@ -5136,7 +5349,7 @@
           <a:p>
             <a:r>
               <a:rPr sz="3200" b="1"/>
-              <a:t>Stretch Goal: StallGuard Torque Feedback</a:t>
+              <a:t>Software Quality and Verification</a:t>
             </a:r>
           </a:p>
         </p:txBody>
@@ -5165,81 +5378,84 @@
           <a:p>
             <a:pPr lvl="1"/>
             <a:r>
-              <a:rPr sz="1800"/>
-              <a:t>TMC2209 has a </a:t>
-            </a:r>
-            <a:r>
               <a:rPr b="1" sz="1800"/>
-              <a:t>DIAG pin</a:t>
-            </a:r>
-            <a:r>
-              <a:rPr sz="1800"/>
-              <a:t> that asserts in microseconds when load crosses the StallGuard threshold</a:t>
+              <a:t>479 unit + integration tests</a:t>
+            </a:r>
+            <a:r>
+              <a:rPr sz="1800"/>
+              <a:t> across 10 files, </a:t>
+            </a:r>
+            <a:r>
+              <a:rPr b="1" sz="1800"/>
+              <a:t>100 % coverage</a:t>
+            </a:r>
+            <a:r>
+              <a:rPr sz="1800"/>
+              <a:t> on every bridge module</a:t>
             </a:r>
           </a:p>
           <a:p>
             <a:pPr lvl="1"/>
             <a:r>
               <a:rPr sz="1800"/>
-              <a:t>Klipper polls over UART at ~4 Hz — </a:t>
-            </a:r>
+              <a:t>Ruff clean; strict type checking; zero `TODO`/`FIXME` in production code</a:t>
+            </a:r>
+          </a:p>
+          <a:p>
+            <a:pPr lvl="1"/>
             <a:r>
               <a:rPr b="1" sz="1800"/>
-              <a:t>250 ms blind window</a:t>
-            </a:r>
-            <a:r>
-              <a:rPr sz="1800"/>
-              <a:t> for stall damage</a:t>
+              <a:t>Firmware CI quality gates</a:t>
+            </a:r>
+            <a:r>
+              <a:rPr sz="1800"/>
+              <a:t> (per-commit):</a:t>
             </a:r>
           </a:p>
           <a:p>
             <a:pPr lvl="1"/>
             <a:r>
+              <a:rPr sz="1800"/>
+              <a:t>`cppcheck` static analysis on the Core1 StallGuard overlay</a:t>
+            </a:r>
+          </a:p>
+          <a:p>
+            <a:pPr lvl="1"/>
+            <a:r>
+              <a:rPr sz="1800"/>
+              <a:t>LTO-aware symbol verification (compiled symbol names survive Link-Time Optimization)</a:t>
+            </a:r>
+          </a:p>
+          <a:p>
+            <a:pPr lvl="1"/>
+            <a:r>
+              <a:rPr sz="1800"/>
+              <a:t>Stack-usage analysis (`-fstack-usage` on overlay entry points)</a:t>
+            </a:r>
+          </a:p>
+          <a:p>
+            <a:pPr lvl="1"/>
+            <a:r>
+              <a:rPr sz="1800"/>
+              <a:t>SRAM + flash budget gates (fails CI if overlay pushes over 200 KB / 1.9 MB)</a:t>
+            </a:r>
+          </a:p>
+          <a:p>
+            <a:pPr lvl="1"/>
+            <a:r>
               <a:rPr b="1" sz="1800"/>
-              <a:t>Our solution:</a:t>
-            </a:r>
-            <a:r>
-              <a:rPr sz="1800"/>
-              <a:t> dedicated firmware on RP2040's idle </a:t>
-            </a:r>
-            <a:r>
-              <a:rPr b="1" sz="1800"/>
-              <a:t>Core1</a:t>
+              <a:t>Weekly patch-freshness cron</a:t>
+            </a:r>
+            <a:r>
+              <a:rPr sz="1800"/>
+              <a:t> re-applies the StallGuard overlay against upstream Klipper → catches drift before it breaks our build</a:t>
             </a:r>
           </a:p>
           <a:p>
             <a:pPr lvl="1"/>
             <a:r>
               <a:rPr sz="1800"/>
-              <a:t>Core1 monitors DIAG pin in hardware, debounces, stores event + timestamp in shared SRAM</a:t>
-            </a:r>
-          </a:p>
-          <a:p>
-            <a:pPr lvl="1"/>
-            <a:r>
-              <a:rPr sz="1800"/>
-              <a:t>Core0 (Klipper) serves `stallguard_query` / `stallguard_clear` MCU commands</a:t>
-            </a:r>
-          </a:p>
-          <a:p>
-            <a:pPr lvl="1"/>
-            <a:r>
-              <a:rPr sz="1800"/>
-              <a:t>Klippy extras module polls at 20 Hz → RTDE input register → URScript can halt robot on stall</a:t>
-            </a:r>
-          </a:p>
-          <a:p>
-            <a:pPr lvl="1"/>
-            <a:r>
-              <a:rPr sz="1800"/>
-              <a:t>Safe spinlock #16, zero impact on Klipper step timing</a:t>
-            </a:r>
-          </a:p>
-          <a:p>
-            <a:pPr lvl="1"/>
-            <a:r>
-              <a:rPr sz="1800"/>
-              <a:t>Validated by `docs/design/hitl_plan.md` TP-06</a:t>
+              <a:t>Hardware-free dev loop: `FakeKlippy` mocks + `ur_rtde` stub → 479 tests run in ~1.5 s with zero hardware</a:t>
             </a:r>
           </a:p>
         </p:txBody>
@@ -5279,7 +5495,7 @@
           <a:p>
             <a:r>
               <a:rPr sz="3200" b="1"/>
-              <a:t>Testing and Validation</a:t>
+              <a:t>Stretch Goal: StallGuard Torque Feedback</a:t>
             </a:r>
           </a:p>
         </p:txBody>
@@ -5308,63 +5524,81 @@
           <a:p>
             <a:pPr lvl="1"/>
             <a:r>
+              <a:rPr sz="1800"/>
+              <a:t>TMC2209 has a </a:t>
+            </a:r>
+            <a:r>
               <a:rPr b="1" sz="1800"/>
-              <a:t>Functional:</a:t>
-            </a:r>
-            <a:r>
-              <a:rPr sz="1800"/>
-              <a:t> `test_basic.script` — 9 sub-tests (init, enable, extrude, retract, home, e-stop, speed-sync, fault, status)</a:t>
+              <a:t>DIAG pin</a:t>
+            </a:r>
+            <a:r>
+              <a:rPr sz="1800"/>
+              <a:t> that asserts in microseconds when load crosses the StallGuard threshold</a:t>
             </a:r>
           </a:p>
           <a:p>
             <a:pPr lvl="1"/>
             <a:r>
+              <a:rPr sz="1800"/>
+              <a:t>Klipper polls over UART at ~4 Hz — </a:t>
+            </a:r>
+            <a:r>
               <a:rPr b="1" sz="1800"/>
-              <a:t>Latency:</a:t>
-            </a:r>
-            <a:r>
-              <a:rPr sz="1800"/>
-              <a:t> oscilloscope from UR30 digital output to SKR Pico gpio14 step pulse</a:t>
+              <a:t>250 ms blind window</a:t>
+            </a:r>
+            <a:r>
+              <a:rPr sz="1800"/>
+              <a:t> for stall damage</a:t>
             </a:r>
           </a:p>
           <a:p>
             <a:pPr lvl="1"/>
             <a:r>
               <a:rPr b="1" sz="1800"/>
-              <a:t>Accuracy:</a:t>
-            </a:r>
-            <a:r>
-              <a:rPr sz="1800"/>
-              <a:t> commanded vs measured rate @ 5, 10, 25, 50 mm/s; gravimetric paste dispensed</a:t>
+              <a:t>Our solution:</a:t>
+            </a:r>
+            <a:r>
+              <a:rPr sz="1800"/>
+              <a:t> dedicated firmware on RP2040's idle </a:t>
+            </a:r>
+            <a:r>
+              <a:rPr b="1" sz="1800"/>
+              <a:t>Core1</a:t>
             </a:r>
           </a:p>
           <a:p>
             <a:pPr lvl="1"/>
             <a:r>
-              <a:rPr b="1" sz="1800"/>
-              <a:t>Fault injection:</a:t>
-            </a:r>
-            <a:r>
-              <a:rPr sz="1800"/>
-              <a:t> RTDE disconnect, Klipper shutdown, stall, power loss</a:t>
+              <a:rPr sz="1800"/>
+              <a:t>Core1 monitors DIAG pin in hardware, debounces, stores event + timestamp in shared SRAM</a:t>
             </a:r>
           </a:p>
           <a:p>
             <a:pPr lvl="1"/>
             <a:r>
-              <a:rPr b="1" sz="1800"/>
-              <a:t>Stretch:</a:t>
-            </a:r>
-            <a:r>
-              <a:rPr sz="1800"/>
-              <a:t> StallGuard HITL (TP-06) — DIAG event reaches URScript in ≤ 100 ms</a:t>
+              <a:rPr sz="1800"/>
+              <a:t>Core0 (Klipper) serves `stallguard_query` / `stallguard_clear` MCU commands</a:t>
             </a:r>
           </a:p>
           <a:p>
             <a:pPr lvl="1"/>
             <a:r>
               <a:rPr sz="1800"/>
-              <a:t>CI/CD: Tier 1 lint+test+shellcheck on every commit; Tier 2 firmware cross-compile; weekly patch-freshness against upstream Klipper</a:t>
+              <a:t>Klippy extras module polls at 20 Hz → RTDE input register → URScript can halt robot on stall</a:t>
+            </a:r>
+          </a:p>
+          <a:p>
+            <a:pPr lvl="1"/>
+            <a:r>
+              <a:rPr sz="1800"/>
+              <a:t>Safe spinlock #16, zero impact on Klipper step timing</a:t>
+            </a:r>
+          </a:p>
+          <a:p>
+            <a:pPr lvl="1"/>
+            <a:r>
+              <a:rPr sz="1800"/>
+              <a:t>Validated by `docs/design/hitl_plan.md` TP-06</a:t>
             </a:r>
           </a:p>
         </p:txBody>
@@ -5378,6 +5612,269 @@
 </file>
 
 <file path=ppt/slides/slide13.xml><?xml version="1.0" encoding="utf-8"?>
+<p:sld xmlns:a="http://schemas.openxmlformats.org/drawingml/2006/main" xmlns:p="http://schemas.openxmlformats.org/presentationml/2006/main" xmlns:r="http://schemas.openxmlformats.org/officeDocument/2006/relationships">
+  <p:cSld>
+    <p:spTree>
+      <p:nvGrpSpPr>
+        <p:cNvPr id="1" name=""/>
+        <p:cNvGrpSpPr/>
+        <p:nvPr/>
+      </p:nvGrpSpPr>
+      <p:grpSpPr/>
+      <p:sp>
+        <p:nvSpPr>
+          <p:cNvPr id="2" name="Title 1"/>
+          <p:cNvSpPr>
+            <a:spLocks noGrp="1"/>
+          </p:cNvSpPr>
+          <p:nvPr>
+            <p:ph type="title"/>
+          </p:nvPr>
+        </p:nvSpPr>
+        <p:spPr/>
+        <p:txBody>
+          <a:bodyPr/>
+          <a:lstStyle/>
+          <a:p>
+            <a:r>
+              <a:rPr sz="3200" b="1"/>
+              <a:t>Testing and Validation</a:t>
+            </a:r>
+          </a:p>
+        </p:txBody>
+      </p:sp>
+      <p:sp>
+        <p:nvSpPr>
+          <p:cNvPr id="3" name="TextBox 2"/>
+          <p:cNvSpPr txBox="1"/>
+          <p:nvPr/>
+        </p:nvSpPr>
+        <p:spPr>
+          <a:xfrm>
+            <a:off x="457200" y="1463040"/>
+            <a:ext cx="8229600" cy="5029200"/>
+          </a:xfrm>
+          <a:prstGeom prst="rect">
+            <a:avLst/>
+          </a:prstGeom>
+          <a:noFill/>
+        </p:spPr>
+        <p:txBody>
+          <a:bodyPr wrap="square">
+            <a:spAutoFit/>
+          </a:bodyPr>
+          <a:lstStyle/>
+          <a:p>
+            <a:pPr lvl="1"/>
+            <a:r>
+              <a:rPr b="1" sz="1800"/>
+              <a:t>Functional:</a:t>
+            </a:r>
+            <a:r>
+              <a:rPr sz="1800"/>
+              <a:t> `test_basic.script` — 9 sub-tests (init, enable, extrude, retract, home, e-stop, speed-sync, fault, status)</a:t>
+            </a:r>
+          </a:p>
+          <a:p>
+            <a:pPr lvl="1"/>
+            <a:r>
+              <a:rPr b="1" sz="1800"/>
+              <a:t>Latency:</a:t>
+            </a:r>
+            <a:r>
+              <a:rPr sz="1800"/>
+              <a:t> oscilloscope from UR30 digital output to SKR Pico gpio14 step pulse</a:t>
+            </a:r>
+          </a:p>
+          <a:p>
+            <a:pPr lvl="1"/>
+            <a:r>
+              <a:rPr b="1" sz="1800"/>
+              <a:t>Accuracy:</a:t>
+            </a:r>
+            <a:r>
+              <a:rPr sz="1800"/>
+              <a:t> commanded vs measured rate @ 5, 10, 25, 50 mm/s; gravimetric paste dispensed</a:t>
+            </a:r>
+          </a:p>
+          <a:p>
+            <a:pPr lvl="1"/>
+            <a:r>
+              <a:rPr b="1" sz="1800"/>
+              <a:t>Fault injection:</a:t>
+            </a:r>
+            <a:r>
+              <a:rPr sz="1800"/>
+              <a:t> RTDE disconnect, Klipper shutdown, stall, power loss</a:t>
+            </a:r>
+          </a:p>
+          <a:p>
+            <a:pPr lvl="1"/>
+            <a:r>
+              <a:rPr b="1" sz="1800"/>
+              <a:t>Stretch:</a:t>
+            </a:r>
+            <a:r>
+              <a:rPr sz="1800"/>
+              <a:t> StallGuard HITL (TP-06) — DIAG event reaches URScript in ≤ 100 ms</a:t>
+            </a:r>
+          </a:p>
+          <a:p>
+            <a:pPr lvl="1"/>
+            <a:r>
+              <a:rPr sz="1800"/>
+              <a:t>CI/CD: Tier 1 lint+test+shellcheck on every commit; Tier 2 firmware cross-compile; weekly patch-freshness against upstream Klipper</a:t>
+            </a:r>
+          </a:p>
+        </p:txBody>
+      </p:sp>
+    </p:spTree>
+  </p:cSld>
+  <p:clrMapOvr>
+    <a:masterClrMapping/>
+  </p:clrMapOvr>
+</p:sld>
+</file>
+
+<file path=ppt/slides/slide14.xml><?xml version="1.0" encoding="utf-8"?>
+<p:sld xmlns:a="http://schemas.openxmlformats.org/drawingml/2006/main" xmlns:p="http://schemas.openxmlformats.org/presentationml/2006/main" xmlns:r="http://schemas.openxmlformats.org/officeDocument/2006/relationships">
+  <p:cSld>
+    <p:spTree>
+      <p:nvGrpSpPr>
+        <p:cNvPr id="1" name=""/>
+        <p:cNvGrpSpPr/>
+        <p:nvPr/>
+      </p:nvGrpSpPr>
+      <p:grpSpPr/>
+      <p:sp>
+        <p:nvSpPr>
+          <p:cNvPr id="2" name="Title 1"/>
+          <p:cNvSpPr>
+            <a:spLocks noGrp="1"/>
+          </p:cNvSpPr>
+          <p:nvPr>
+            <p:ph type="title"/>
+          </p:nvPr>
+        </p:nvSpPr>
+        <p:spPr/>
+        <p:txBody>
+          <a:bodyPr/>
+          <a:lstStyle/>
+          <a:p>
+            <a:r>
+              <a:rPr sz="3200" b="1"/>
+              <a:t>Measured Performance (Phase 4)</a:t>
+            </a:r>
+          </a:p>
+        </p:txBody>
+      </p:sp>
+      <p:sp>
+        <p:nvSpPr>
+          <p:cNvPr id="3" name="TextBox 2"/>
+          <p:cNvSpPr txBox="1"/>
+          <p:nvPr/>
+        </p:nvSpPr>
+        <p:spPr>
+          <a:xfrm>
+            <a:off x="457200" y="1463040"/>
+            <a:ext cx="8229600" cy="5029200"/>
+          </a:xfrm>
+          <a:prstGeom prst="rect">
+            <a:avLst/>
+          </a:prstGeom>
+          <a:noFill/>
+        </p:spPr>
+        <p:txBody>
+          <a:bodyPr wrap="square">
+            <a:spAutoFit/>
+          </a:bodyPr>
+          <a:lstStyle/>
+          <a:p>
+            <a:pPr lvl="1"/>
+            <a:r>
+              <a:rPr b="1" sz="1800"/>
+              <a:t>Figure 8 (left):</a:t>
+            </a:r>
+            <a:r>
+              <a:rPr sz="1800"/>
+              <a:t> predicted vs measured latency per signal-path segment — bar chart from `scripts/report_figures.py --csv &lt;bringup.csv&gt;`</a:t>
+            </a:r>
+          </a:p>
+          <a:p>
+            <a:pPr lvl="1"/>
+            <a:r>
+              <a:rPr b="1" sz="1800"/>
+              <a:t>Figure 10 (right):</a:t>
+            </a:r>
+            <a:r>
+              <a:rPr sz="1800"/>
+              <a:t> commanded vs measured extrusion rate over a 30 s run at 5 / 10 / 25 / 50 mm/s — with ±2 % spec band shaded</a:t>
+            </a:r>
+          </a:p>
+          <a:p>
+            <a:pPr lvl="1"/>
+            <a:r>
+              <a:rPr sz="1800"/>
+              <a:t>Key numbers to recite:</a:t>
+            </a:r>
+          </a:p>
+          <a:p>
+            <a:pPr lvl="1"/>
+            <a:r>
+              <a:rPr sz="1800"/>
+              <a:t>End-to-end latency: p50 = </a:t>
+            </a:r>
+            <a:r>
+              <a:rPr b="1" sz="1800"/>
+              <a:t>[TBD from Wed data]</a:t>
+            </a:r>
+            <a:r>
+              <a:rPr sz="1800"/>
+              <a:t>, p99 = </a:t>
+            </a:r>
+            <a:r>
+              <a:rPr b="1" sz="1800"/>
+              <a:t>[TBD]</a:t>
+            </a:r>
+            <a:r>
+              <a:rPr sz="1800"/>
+              <a:t> (target &lt; 20 ms)</a:t>
+            </a:r>
+          </a:p>
+          <a:p>
+            <a:pPr lvl="1"/>
+            <a:r>
+              <a:rPr sz="1800"/>
+              <a:t>Steady-state accuracy: mean |err| = </a:t>
+            </a:r>
+            <a:r>
+              <a:rPr b="1" sz="1800"/>
+              <a:t>[TBD]</a:t>
+            </a:r>
+            <a:r>
+              <a:rPr sz="1800"/>
+              <a:t> %, p95 = </a:t>
+            </a:r>
+            <a:r>
+              <a:rPr b="1" sz="1800"/>
+              <a:t>[TBD]</a:t>
+            </a:r>
+            <a:r>
+              <a:rPr sz="1800"/>
+              <a:t> % (target &lt; 5 %)</a:t>
+            </a:r>
+          </a:p>
+        </p:txBody>
+      </p:sp>
+    </p:spTree>
+  </p:cSld>
+  <p:clrMapOvr>
+    <a:masterClrMapping/>
+  </p:clrMapOvr>
+</p:sld>
+</file>
+
+<file path=ppt/slides/slide15.xml><?xml version="1.0" encoding="utf-8"?>
 <p:sld xmlns:a="http://schemas.openxmlformats.org/drawingml/2006/main" xmlns:p="http://schemas.openxmlformats.org/presentationml/2006/main" xmlns:r="http://schemas.openxmlformats.org/officeDocument/2006/relationships">
   <p:cSld>
     <p:spTree>
@@ -5514,7 +6011,7 @@
                     <a:p>
                       <a:r>
                         <a:rPr sz="1200"/>
-                        <a:t>5–8 ms predicted; measurement deferred to Phase 4</a:t>
+                        <a:t>5–8 ms predicted; measurement from Phase 4 (see prior slide)</a:t>
                       </a:r>
                     </a:p>
                   </a:txBody>
@@ -5626,7 +6123,7 @@
                     <a:p>
                       <a:r>
                         <a:rPr sz="1200"/>
-                        <a:t>Deferred to hardware</a:t>
+                        <a:t>Phase 4 (see prior slide)</a:t>
                       </a:r>
                     </a:p>
                   </a:txBody>
@@ -5665,210 +6162,6 @@
           </a:graphicData>
         </a:graphic>
       </p:graphicFrame>
-    </p:spTree>
-  </p:cSld>
-  <p:clrMapOvr>
-    <a:masterClrMapping/>
-  </p:clrMapOvr>
-</p:sld>
-</file>
-
-<file path=ppt/slides/slide14.xml><?xml version="1.0" encoding="utf-8"?>
-<p:sld xmlns:a="http://schemas.openxmlformats.org/drawingml/2006/main" xmlns:p="http://schemas.openxmlformats.org/presentationml/2006/main" xmlns:r="http://schemas.openxmlformats.org/officeDocument/2006/relationships">
-  <p:cSld>
-    <p:spTree>
-      <p:nvGrpSpPr>
-        <p:cNvPr id="1" name=""/>
-        <p:cNvGrpSpPr/>
-        <p:nvPr/>
-      </p:nvGrpSpPr>
-      <p:grpSpPr/>
-      <p:sp>
-        <p:nvSpPr>
-          <p:cNvPr id="2" name="Title 1"/>
-          <p:cNvSpPr>
-            <a:spLocks noGrp="1"/>
-          </p:cNvSpPr>
-          <p:nvPr>
-            <p:ph type="title"/>
-          </p:nvPr>
-        </p:nvSpPr>
-        <p:spPr/>
-        <p:txBody>
-          <a:bodyPr/>
-          <a:lstStyle/>
-          <a:p>
-            <a:r>
-              <a:rPr sz="3200" b="1"/>
-              <a:t>Lessons Learned — Bolton Process in Practice</a:t>
-            </a:r>
-          </a:p>
-        </p:txBody>
-      </p:sp>
-      <p:sp>
-        <p:nvSpPr>
-          <p:cNvPr id="3" name="TextBox 2"/>
-          <p:cNvSpPr txBox="1"/>
-          <p:nvPr/>
-        </p:nvSpPr>
-        <p:spPr>
-          <a:xfrm>
-            <a:off x="457200" y="1463040"/>
-            <a:ext cx="8229600" cy="5029200"/>
-          </a:xfrm>
-          <a:prstGeom prst="rect">
-            <a:avLst/>
-          </a:prstGeom>
-          <a:noFill/>
-        </p:spPr>
-        <p:txBody>
-          <a:bodyPr wrap="square">
-            <a:spAutoFit/>
-          </a:bodyPr>
-          <a:lstStyle/>
-          <a:p>
-            <a:pPr lvl="1"/>
-            <a:r>
-              <a:rPr sz="1800"/>
-              <a:t>Step 2 ↔ Step 4 iteration was real: the original "slave Pi as serial bridge" architecture died once the Klipper trade study made direct USB viable → saved 0.12 A, one point of failure</a:t>
-            </a:r>
-          </a:p>
-          <a:p>
-            <a:pPr lvl="1"/>
-            <a:r>
-              <a:rPr sz="1800"/>
-              <a:t>Specification tightened after driver research: TMC2209 is </a:t>
-            </a:r>
-            <a:r>
-              <a:rPr b="1" sz="1800"/>
-              <a:t>thermally limited to 0.8 A</a:t>
-            </a:r>
-            <a:r>
-              <a:rPr sz="1800"/>
-              <a:t> without cooling, not 1.2 A — forced a cooling-fan line item</a:t>
-            </a:r>
-          </a:p>
-          <a:p>
-            <a:pPr lvl="1"/>
-            <a:r>
-              <a:rPr sz="1800"/>
-              <a:t>Hardware-free development is viable: `FakeKlippy` mocks + `ur_rtde` stub → 479 tests run with zero hardware in 1.5 s</a:t>
-            </a:r>
-          </a:p>
-          <a:p>
-            <a:pPr lvl="1"/>
-            <a:r>
-              <a:rPr sz="1800"/>
-              <a:t>CI/CD pays for itself: patch-freshness workflow catches Klipper upstream drift weekly before it breaks our overlay</a:t>
-            </a:r>
-          </a:p>
-        </p:txBody>
-      </p:sp>
-    </p:spTree>
-  </p:cSld>
-  <p:clrMapOvr>
-    <a:masterClrMapping/>
-  </p:clrMapOvr>
-</p:sld>
-</file>
-
-<file path=ppt/slides/slide15.xml><?xml version="1.0" encoding="utf-8"?>
-<p:sld xmlns:a="http://schemas.openxmlformats.org/drawingml/2006/main" xmlns:p="http://schemas.openxmlformats.org/presentationml/2006/main" xmlns:r="http://schemas.openxmlformats.org/officeDocument/2006/relationships">
-  <p:cSld>
-    <p:spTree>
-      <p:nvGrpSpPr>
-        <p:cNvPr id="1" name=""/>
-        <p:cNvGrpSpPr/>
-        <p:nvPr/>
-      </p:nvGrpSpPr>
-      <p:grpSpPr/>
-      <p:sp>
-        <p:nvSpPr>
-          <p:cNvPr id="2" name="Title 1"/>
-          <p:cNvSpPr>
-            <a:spLocks noGrp="1"/>
-          </p:cNvSpPr>
-          <p:nvPr>
-            <p:ph type="title"/>
-          </p:nvPr>
-        </p:nvSpPr>
-        <p:spPr/>
-        <p:txBody>
-          <a:bodyPr/>
-          <a:lstStyle/>
-          <a:p>
-            <a:r>
-              <a:rPr sz="3200" b="1"/>
-              <a:t>Future Work</a:t>
-            </a:r>
-          </a:p>
-        </p:txBody>
-      </p:sp>
-      <p:sp>
-        <p:nvSpPr>
-          <p:cNvPr id="3" name="TextBox 2"/>
-          <p:cNvSpPr txBox="1"/>
-          <p:nvPr/>
-        </p:nvSpPr>
-        <p:spPr>
-          <a:xfrm>
-            <a:off x="457200" y="1463040"/>
-            <a:ext cx="8229600" cy="5029200"/>
-          </a:xfrm>
-          <a:prstGeom prst="rect">
-            <a:avLst/>
-          </a:prstGeom>
-          <a:noFill/>
-        </p:spPr>
-        <p:txBody>
-          <a:bodyPr wrap="square">
-            <a:spAutoFit/>
-          </a:bodyPr>
-          <a:lstStyle/>
-          <a:p>
-            <a:pPr lvl="1"/>
-            <a:r>
-              <a:rPr sz="1800"/>
-              <a:t>Full pump + paste characterization on delivered hardware</a:t>
-            </a:r>
-          </a:p>
-          <a:p>
-            <a:pPr lvl="1"/>
-            <a:r>
-              <a:rPr sz="1800"/>
-              <a:t>Measured latency + accuracy numbers (Phase 4 completion)</a:t>
-            </a:r>
-          </a:p>
-          <a:p>
-            <a:pPr lvl="1"/>
-            <a:r>
-              <a:rPr sz="1800"/>
-              <a:t>Multi-material support (swap paste cartridges mid-print)</a:t>
-            </a:r>
-          </a:p>
-          <a:p>
-            <a:pPr lvl="1"/>
-            <a:r>
-              <a:rPr sz="1800"/>
-              <a:t>URCap for teach-pendant UI (Java SDK, not needed for MVP)</a:t>
-            </a:r>
-          </a:p>
-          <a:p>
-            <a:pPr lvl="1"/>
-            <a:r>
-              <a:rPr sz="1800"/>
-              <a:t>Predictive G-code timeshifting using Klipper's 100 ms lookahead buffer</a:t>
-            </a:r>
-          </a:p>
-          <a:p>
-            <a:pPr lvl="1"/>
-            <a:r>
-              <a:rPr sz="1800"/>
-              <a:t>Production StallGuard tuning with real paste loads</a:t>
-            </a:r>
-          </a:p>
-        </p:txBody>
-      </p:sp>
     </p:spTree>
   </p:cSld>
   <p:clrMapOvr>
@@ -5904,7 +6197,7 @@
           <a:p>
             <a:r>
               <a:rPr sz="3200" b="1"/>
-              <a:t>Thank You — Questions?</a:t>
+              <a:t>Lessons Learned — Bolton Process in Practice</a:t>
             </a:r>
           </a:p>
         </p:txBody>
@@ -5931,87 +6224,39 @@
           </a:bodyPr>
           <a:lstStyle/>
           <a:p>
-            <a:pPr/>
+            <a:pPr lvl="1"/>
+            <a:r>
+              <a:rPr sz="1800"/>
+              <a:t>Step 2 ↔ Step 4 iteration was real: the original "slave Pi as serial bridge" architecture died once the Klipper trade study made direct USB viable → saved 0.12 A, one point of failure</a:t>
+            </a:r>
+          </a:p>
+          <a:p>
+            <a:pPr lvl="1"/>
+            <a:r>
+              <a:rPr sz="1800"/>
+              <a:t>Specification tightened after driver research: TMC2209 is </a:t>
+            </a:r>
             <a:r>
               <a:rPr b="1" sz="1800"/>
-              <a:t>Repo:</a:t>
-            </a:r>
-            <a:r>
-              <a:rPr sz="1800"/>
-              <a:t> github.com/wrbell/W26-Cobot-Axis</a:t>
-            </a:r>
-          </a:p>
-          <a:p>
-            <a:pPr/>
-            <a:r>
-              <a:rPr b="1" sz="1800"/>
-              <a:t>Team:</a:t>
-            </a:r>
-            <a:r>
-              <a:rPr sz="1800"/>
-              <a:t> Willem Bell (Software/EE) · Dawood _____ (Mechanical)</a:t>
-            </a:r>
-          </a:p>
-          <a:p>
-            <a:pPr/>
-            <a:r>
-              <a:rPr b="1" sz="1800"/>
-              <a:t>Advisor:</a:t>
-            </a:r>
-            <a:r>
-              <a:rPr sz="1800"/>
-              <a:t> Prof. Pannier</a:t>
-            </a:r>
-          </a:p>
-          <a:p>
-            <a:pPr/>
-            <a:r>
-              <a:rPr sz="1800"/>
-              <a:t>Key references:</a:t>
+              <a:t>thermally limited to 0.8 A</a:t>
+            </a:r>
+            <a:r>
+              <a:rPr sz="1800"/>
+              <a:t> without cooling, not 1.2 A — forced a cooling-fan line item</a:t>
             </a:r>
           </a:p>
           <a:p>
             <a:pPr lvl="1"/>
             <a:r>
               <a:rPr sz="1800"/>
-              <a:t>W. Bolton, </a:t>
-            </a:r>
-            <a:r>
-              <a:rPr i="1" sz="1800"/>
-              <a:t>Mechatronics</a:t>
-            </a:r>
-            <a:r>
-              <a:rPr sz="1800"/>
-              <a:t>, 7th ed., Pearson, 2019</a:t>
+              <a:t>Hardware-free development is viable: `FakeKlippy` mocks + `ur_rtde` stub → 479 tests run with zero hardware in 1.5 s</a:t>
             </a:r>
           </a:p>
           <a:p>
             <a:pPr lvl="1"/>
             <a:r>
               <a:rPr sz="1800"/>
-              <a:t>SDU Robotics, </a:t>
-            </a:r>
-            <a:r>
-              <a:rPr i="1" sz="1800"/>
-              <a:t>ur_rtde</a:t>
-            </a:r>
-            <a:r>
-              <a:rPr sz="1800"/>
-              <a:t> library</a:t>
-            </a:r>
-          </a:p>
-          <a:p>
-            <a:pPr lvl="1"/>
-            <a:r>
-              <a:rPr sz="1800"/>
-              <a:t>Klipper3D documentation</a:t>
-            </a:r>
-          </a:p>
-          <a:p>
-            <a:pPr lvl="1"/>
-            <a:r>
-              <a:rPr sz="1800"/>
-              <a:t>BTT SKR Pico V1.0 user manual; Trinamic TMC2209 datasheet</a:t>
+              <a:t>CI/CD pays for itself: patch-freshness workflow catches Klipper upstream drift weekly before it breaks our overlay</a:t>
             </a:r>
           </a:p>
         </p:txBody>
@@ -6025,6 +6270,258 @@
 </file>
 
 <file path=ppt/slides/slide17.xml><?xml version="1.0" encoding="utf-8"?>
+<p:sld xmlns:a="http://schemas.openxmlformats.org/drawingml/2006/main" xmlns:p="http://schemas.openxmlformats.org/presentationml/2006/main" xmlns:r="http://schemas.openxmlformats.org/officeDocument/2006/relationships">
+  <p:cSld>
+    <p:spTree>
+      <p:nvGrpSpPr>
+        <p:cNvPr id="1" name=""/>
+        <p:cNvGrpSpPr/>
+        <p:nvPr/>
+      </p:nvGrpSpPr>
+      <p:grpSpPr/>
+      <p:sp>
+        <p:nvSpPr>
+          <p:cNvPr id="2" name="Title 1"/>
+          <p:cNvSpPr>
+            <a:spLocks noGrp="1"/>
+          </p:cNvSpPr>
+          <p:nvPr>
+            <p:ph type="title"/>
+          </p:nvPr>
+        </p:nvSpPr>
+        <p:spPr/>
+        <p:txBody>
+          <a:bodyPr/>
+          <a:lstStyle/>
+          <a:p>
+            <a:r>
+              <a:rPr sz="3200" b="1"/>
+              <a:t>Future Work</a:t>
+            </a:r>
+          </a:p>
+        </p:txBody>
+      </p:sp>
+      <p:sp>
+        <p:nvSpPr>
+          <p:cNvPr id="3" name="TextBox 2"/>
+          <p:cNvSpPr txBox="1"/>
+          <p:nvPr/>
+        </p:nvSpPr>
+        <p:spPr>
+          <a:xfrm>
+            <a:off x="457200" y="1463040"/>
+            <a:ext cx="8229600" cy="5029200"/>
+          </a:xfrm>
+          <a:prstGeom prst="rect">
+            <a:avLst/>
+          </a:prstGeom>
+          <a:noFill/>
+        </p:spPr>
+        <p:txBody>
+          <a:bodyPr wrap="square">
+            <a:spAutoFit/>
+          </a:bodyPr>
+          <a:lstStyle/>
+          <a:p>
+            <a:pPr lvl="1"/>
+            <a:r>
+              <a:rPr sz="1800"/>
+              <a:t>Full pump + paste characterization on delivered hardware</a:t>
+            </a:r>
+          </a:p>
+          <a:p>
+            <a:pPr lvl="1"/>
+            <a:r>
+              <a:rPr sz="1800"/>
+              <a:t>Measured latency + accuracy numbers (Phase 4 completion)</a:t>
+            </a:r>
+          </a:p>
+          <a:p>
+            <a:pPr lvl="1"/>
+            <a:r>
+              <a:rPr sz="1800"/>
+              <a:t>Multi-material support (swap paste cartridges mid-print)</a:t>
+            </a:r>
+          </a:p>
+          <a:p>
+            <a:pPr lvl="1"/>
+            <a:r>
+              <a:rPr sz="1800"/>
+              <a:t>URCap for teach-pendant UI (Java SDK, not needed for MVP)</a:t>
+            </a:r>
+          </a:p>
+          <a:p>
+            <a:pPr lvl="1"/>
+            <a:r>
+              <a:rPr sz="1800"/>
+              <a:t>Predictive G-code timeshifting using Klipper's 100 ms lookahead buffer</a:t>
+            </a:r>
+          </a:p>
+          <a:p>
+            <a:pPr lvl="1"/>
+            <a:r>
+              <a:rPr sz="1800"/>
+              <a:t>Production StallGuard tuning with real paste loads</a:t>
+            </a:r>
+          </a:p>
+        </p:txBody>
+      </p:sp>
+    </p:spTree>
+  </p:cSld>
+  <p:clrMapOvr>
+    <a:masterClrMapping/>
+  </p:clrMapOvr>
+</p:sld>
+</file>
+
+<file path=ppt/slides/slide18.xml><?xml version="1.0" encoding="utf-8"?>
+<p:sld xmlns:a="http://schemas.openxmlformats.org/drawingml/2006/main" xmlns:p="http://schemas.openxmlformats.org/presentationml/2006/main" xmlns:r="http://schemas.openxmlformats.org/officeDocument/2006/relationships">
+  <p:cSld>
+    <p:spTree>
+      <p:nvGrpSpPr>
+        <p:cNvPr id="1" name=""/>
+        <p:cNvGrpSpPr/>
+        <p:nvPr/>
+      </p:nvGrpSpPr>
+      <p:grpSpPr/>
+      <p:sp>
+        <p:nvSpPr>
+          <p:cNvPr id="2" name="Title 1"/>
+          <p:cNvSpPr>
+            <a:spLocks noGrp="1"/>
+          </p:cNvSpPr>
+          <p:nvPr>
+            <p:ph type="title"/>
+          </p:nvPr>
+        </p:nvSpPr>
+        <p:spPr/>
+        <p:txBody>
+          <a:bodyPr/>
+          <a:lstStyle/>
+          <a:p>
+            <a:r>
+              <a:rPr sz="3200" b="1"/>
+              <a:t>Thank You — Questions?</a:t>
+            </a:r>
+          </a:p>
+        </p:txBody>
+      </p:sp>
+      <p:sp>
+        <p:nvSpPr>
+          <p:cNvPr id="3" name="TextBox 2"/>
+          <p:cNvSpPr txBox="1"/>
+          <p:nvPr/>
+        </p:nvSpPr>
+        <p:spPr>
+          <a:xfrm>
+            <a:off x="457200" y="1463040"/>
+            <a:ext cx="8229600" cy="5029200"/>
+          </a:xfrm>
+          <a:prstGeom prst="rect">
+            <a:avLst/>
+          </a:prstGeom>
+          <a:noFill/>
+        </p:spPr>
+        <p:txBody>
+          <a:bodyPr wrap="square">
+            <a:spAutoFit/>
+          </a:bodyPr>
+          <a:lstStyle/>
+          <a:p>
+            <a:pPr/>
+            <a:r>
+              <a:rPr b="1" sz="1800"/>
+              <a:t>Repo:</a:t>
+            </a:r>
+            <a:r>
+              <a:rPr sz="1800"/>
+              <a:t> github.com/wrbell/W26-Cobot-Axis</a:t>
+            </a:r>
+          </a:p>
+          <a:p>
+            <a:pPr/>
+            <a:r>
+              <a:rPr b="1" sz="1800"/>
+              <a:t>Team:</a:t>
+            </a:r>
+            <a:r>
+              <a:rPr sz="1800"/>
+              <a:t> Willem Bell (Software/EE) · Dawood _____ (Mechanical)</a:t>
+            </a:r>
+          </a:p>
+          <a:p>
+            <a:pPr/>
+            <a:r>
+              <a:rPr b="1" sz="1800"/>
+              <a:t>Advisor:</a:t>
+            </a:r>
+            <a:r>
+              <a:rPr sz="1800"/>
+              <a:t> Prof. Pannier</a:t>
+            </a:r>
+          </a:p>
+          <a:p>
+            <a:pPr/>
+            <a:r>
+              <a:rPr sz="1800"/>
+              <a:t>Key references:</a:t>
+            </a:r>
+          </a:p>
+          <a:p>
+            <a:pPr lvl="1"/>
+            <a:r>
+              <a:rPr sz="1800"/>
+              <a:t>W. Bolton, </a:t>
+            </a:r>
+            <a:r>
+              <a:rPr i="1" sz="1800"/>
+              <a:t>Mechatronics</a:t>
+            </a:r>
+            <a:r>
+              <a:rPr sz="1800"/>
+              <a:t>, 7th ed., Pearson, 2019</a:t>
+            </a:r>
+          </a:p>
+          <a:p>
+            <a:pPr lvl="1"/>
+            <a:r>
+              <a:rPr sz="1800"/>
+              <a:t>SDU Robotics, </a:t>
+            </a:r>
+            <a:r>
+              <a:rPr i="1" sz="1800"/>
+              <a:t>ur_rtde</a:t>
+            </a:r>
+            <a:r>
+              <a:rPr sz="1800"/>
+              <a:t> library</a:t>
+            </a:r>
+          </a:p>
+          <a:p>
+            <a:pPr lvl="1"/>
+            <a:r>
+              <a:rPr sz="1800"/>
+              <a:t>Klipper3D documentation</a:t>
+            </a:r>
+          </a:p>
+          <a:p>
+            <a:pPr lvl="1"/>
+            <a:r>
+              <a:rPr sz="1800"/>
+              <a:t>BTT SKR Pico V1.0 user manual; Trinamic TMC2209 datasheet</a:t>
+            </a:r>
+          </a:p>
+        </p:txBody>
+      </p:sp>
+    </p:spTree>
+  </p:cSld>
+  <p:clrMapOvr>
+    <a:masterClrMapping/>
+  </p:clrMapOvr>
+</p:sld>
+</file>
+
+<file path=ppt/slides/slide19.xml><?xml version="1.0" encoding="utf-8"?>
 <p:sld xmlns:a="http://schemas.openxmlformats.org/drawingml/2006/main" xmlns:p="http://schemas.openxmlformats.org/presentationml/2006/main" xmlns:r="http://schemas.openxmlformats.org/officeDocument/2006/relationships">
   <p:cSld>
     <p:spTree>
@@ -6449,7 +6946,109 @@
 </p:sld>
 </file>
 
-<file path=ppt/slides/slide18.xml><?xml version="1.0" encoding="utf-8"?>
+<file path=ppt/slides/slide2.xml><?xml version="1.0" encoding="utf-8"?>
+<p:sld xmlns:a="http://schemas.openxmlformats.org/drawingml/2006/main" xmlns:p="http://schemas.openxmlformats.org/presentationml/2006/main" xmlns:r="http://schemas.openxmlformats.org/officeDocument/2006/relationships">
+  <p:cSld>
+    <p:spTree>
+      <p:nvGrpSpPr>
+        <p:cNvPr id="1" name=""/>
+        <p:cNvGrpSpPr/>
+        <p:nvPr/>
+      </p:nvGrpSpPr>
+      <p:grpSpPr/>
+      <p:sp>
+        <p:nvSpPr>
+          <p:cNvPr id="2" name="Title 1"/>
+          <p:cNvSpPr>
+            <a:spLocks noGrp="1"/>
+          </p:cNvSpPr>
+          <p:nvPr>
+            <p:ph type="title"/>
+          </p:nvPr>
+        </p:nvSpPr>
+        <p:spPr/>
+        <p:txBody>
+          <a:bodyPr/>
+          <a:lstStyle/>
+          <a:p>
+            <a:r>
+              <a:rPr sz="3200" b="1"/>
+              <a:t>The Need</a:t>
+            </a:r>
+          </a:p>
+        </p:txBody>
+      </p:sp>
+      <p:sp>
+        <p:nvSpPr>
+          <p:cNvPr id="3" name="TextBox 2"/>
+          <p:cNvSpPr txBox="1"/>
+          <p:nvPr/>
+        </p:nvSpPr>
+        <p:spPr>
+          <a:xfrm>
+            <a:off x="457200" y="1463040"/>
+            <a:ext cx="8229600" cy="5029200"/>
+          </a:xfrm>
+          <a:prstGeom prst="rect">
+            <a:avLst/>
+          </a:prstGeom>
+          <a:noFill/>
+        </p:spPr>
+        <p:txBody>
+          <a:bodyPr wrap="square">
+            <a:spAutoFit/>
+          </a:bodyPr>
+          <a:lstStyle/>
+          <a:p>
+            <a:pPr lvl="1"/>
+            <a:r>
+              <a:rPr sz="1800"/>
+              <a:t>UR30 collaborative robot — no native mechanism for an external coordinated motion axis</a:t>
+            </a:r>
+          </a:p>
+          <a:p>
+            <a:pPr lvl="1"/>
+            <a:r>
+              <a:rPr sz="1800"/>
+              <a:t>Metal-paste additive manufacturing requires a pump synchronized to TCP velocity</a:t>
+            </a:r>
+          </a:p>
+          <a:p>
+            <a:pPr lvl="1"/>
+            <a:r>
+              <a:rPr sz="1800"/>
+              <a:t>Commercial UR+ accessories: expensive, proprietary, not tuned for paste</a:t>
+            </a:r>
+          </a:p>
+          <a:p>
+            <a:pPr lvl="1"/>
+            <a:r>
+              <a:rPr sz="1800"/>
+              <a:t>Digital I/O alternative: on/off only — no speed synchronization</a:t>
+            </a:r>
+          </a:p>
+          <a:p>
+            <a:pPr lvl="1"/>
+            <a:r>
+              <a:rPr b="1" sz="1800"/>
+              <a:t>Goal:</a:t>
+            </a:r>
+            <a:r>
+              <a:rPr sz="1800"/>
+              <a:t> external stepper axis that takes commands from the UR30 controller in real time, dispenses metal paste, reports status</a:t>
+            </a:r>
+          </a:p>
+        </p:txBody>
+      </p:sp>
+    </p:spTree>
+  </p:cSld>
+  <p:clrMapOvr>
+    <a:masterClrMapping/>
+  </p:clrMapOvr>
+</p:sld>
+</file>
+
+<file path=ppt/slides/slide20.xml><?xml version="1.0" encoding="utf-8"?>
 <p:sld xmlns:a="http://schemas.openxmlformats.org/drawingml/2006/main" xmlns:p="http://schemas.openxmlformats.org/presentationml/2006/main" xmlns:r="http://schemas.openxmlformats.org/officeDocument/2006/relationships">
   <p:cSld>
     <p:spTree>
@@ -6944,7 +7543,7 @@
 </p:sld>
 </file>
 
-<file path=ppt/slides/slide19.xml><?xml version="1.0" encoding="utf-8"?>
+<file path=ppt/slides/slide21.xml><?xml version="1.0" encoding="utf-8"?>
 <p:sld xmlns:a="http://schemas.openxmlformats.org/drawingml/2006/main" xmlns:p="http://schemas.openxmlformats.org/presentationml/2006/main" xmlns:r="http://schemas.openxmlformats.org/officeDocument/2006/relationships">
   <p:cSld>
     <p:spTree>
@@ -6971,7 +7570,7 @@
           <a:p>
             <a:r>
               <a:rPr sz="3200" b="1"/>
-              <a:t>Backup: RTDE Register Map</a:t>
+              <a:t>Backup: Failure Modes and Safe-State Handling</a:t>
             </a:r>
           </a:p>
         </p:txBody>
@@ -7000,82 +7599,437 @@
           <a:p>
             <a:pPr/>
             <a:r>
+              <a:rPr sz="1800"/>
+              <a:t>The state machine in `bridge_daemon.py` drives all off-nominal behavior to a single </a:t>
+            </a:r>
+            <a:r>
               <a:rPr b="1" sz="1800"/>
-              <a:t>UR30 → Pi (output)</a:t>
+              <a:t>FAULT</a:t>
+            </a:r>
+            <a:r>
+              <a:rPr sz="1800"/>
+              <a:t> state with the stepper disabled.</a:t>
             </a:r>
           </a:p>
           <a:p>
             <a:pPr/>
             <a:r>
               <a:rPr b="1" sz="1800"/>
-              <a:t>Pi → UR30 (input)</a:t>
-            </a:r>
-          </a:p>
-          <a:p>
-            <a:pPr/>
-            <a:r>
-              <a:rPr sz="1800"/>
-              <a:t>Reserved: StallGuard load, driver temperature, position target</a:t>
-            </a:r>
-          </a:p>
-          <a:p>
-            <a:pPr lvl="1"/>
-            <a:r>
-              <a:rPr sz="1800"/>
-              <a:t>`output_int_register_0` — extrusion mode (0/1/2)</a:t>
-            </a:r>
-          </a:p>
-          <a:p>
-            <a:pPr lvl="1"/>
-            <a:r>
-              <a:rPr sz="1800"/>
-              <a:t>`output_double_register_0` — commanded rate (mm/s)</a:t>
-            </a:r>
-          </a:p>
-          <a:p>
-            <a:pPr lvl="1"/>
-            <a:r>
-              <a:rPr sz="1800"/>
-              <a:t>`output_double_register_1` — TCP speed (mm/s)</a:t>
-            </a:r>
-          </a:p>
-          <a:p>
-            <a:pPr lvl="1"/>
-            <a:r>
-              <a:rPr sz="1800"/>
-              <a:t>`output_bit_register_64/65/66` — enable / e-stop / home</a:t>
-            </a:r>
-          </a:p>
-          <a:p>
-            <a:pPr lvl="1"/>
-            <a:r>
-              <a:rPr sz="1800"/>
-              <a:t>`input_int_register_0` — status (0 idle / 1 running / 2 error / 3 homing)</a:t>
-            </a:r>
-          </a:p>
-          <a:p>
-            <a:pPr lvl="1"/>
-            <a:r>
-              <a:rPr sz="1800"/>
-              <a:t>`input_int_register_1` — error code (0/1/2/3)</a:t>
-            </a:r>
-          </a:p>
-          <a:p>
-            <a:pPr lvl="1"/>
-            <a:r>
-              <a:rPr sz="1800"/>
-              <a:t>`input_double_register_0` — actual rate (mm/s)</a:t>
-            </a:r>
-          </a:p>
-          <a:p>
-            <a:pPr lvl="1"/>
-            <a:r>
-              <a:rPr sz="1800"/>
-              <a:t>`input_bit_register_64/65` — ready / fault</a:t>
-            </a:r>
-          </a:p>
-        </p:txBody>
-      </p:sp>
+              <a:t>Design principle:</a:t>
+            </a:r>
+            <a:r>
+              <a:rPr sz="1800"/>
+              <a:t> the stepper is off by default — every non-idle state is an explicit positive command. A lost connection cannot leave the motor running.</a:t>
+            </a:r>
+          </a:p>
+        </p:txBody>
+      </p:sp>
+      <p:graphicFrame>
+        <p:nvGraphicFramePr>
+          <p:cNvPr id="4" name="Table 3"/>
+          <p:cNvGraphicFramePr>
+            <a:graphicFrameLocks noGrp="1"/>
+          </p:cNvGraphicFramePr>
+          <p:nvPr/>
+        </p:nvGraphicFramePr>
+        <p:xfrm>
+          <a:off x="457200" y="2560320"/>
+          <a:ext cx="8229600" cy="2560320"/>
+        </p:xfrm>
+        <a:graphic>
+          <a:graphicData uri="http://schemas.openxmlformats.org/drawingml/2006/table">
+            <a:tbl>
+              <a:tblPr firstRow="1" bandRow="1">
+                <a:tableStyleId>{5C22544A-7EE6-4342-B048-85BDC9FD1C3A}</a:tableStyleId>
+              </a:tblPr>
+              <a:tblGrid>
+                <a:gridCol w="2057400"/>
+                <a:gridCol w="2057400"/>
+                <a:gridCol w="2057400"/>
+                <a:gridCol w="2057400"/>
+              </a:tblGrid>
+              <a:tr h="365760">
+                <a:tc>
+                  <a:txBody>
+                    <a:bodyPr/>
+                    <a:lstStyle/>
+                    <a:p>
+                      <a:r>
+                        <a:rPr sz="1200" b="1"/>
+                        <a:t>Failure</a:t>
+                      </a:r>
+                    </a:p>
+                  </a:txBody>
+                  <a:tcPr/>
+                </a:tc>
+                <a:tc>
+                  <a:txBody>
+                    <a:bodyPr/>
+                    <a:lstStyle/>
+                    <a:p>
+                      <a:r>
+                        <a:rPr sz="1200" b="1"/>
+                        <a:t>Detector</a:t>
+                      </a:r>
+                    </a:p>
+                  </a:txBody>
+                  <a:tcPr/>
+                </a:tc>
+                <a:tc>
+                  <a:txBody>
+                    <a:bodyPr/>
+                    <a:lstStyle/>
+                    <a:p>
+                      <a:r>
+                        <a:rPr sz="1200" b="1"/>
+                        <a:t>Response time</a:t>
+                      </a:r>
+                    </a:p>
+                  </a:txBody>
+                  <a:tcPr/>
+                </a:tc>
+                <a:tc>
+                  <a:txBody>
+                    <a:bodyPr/>
+                    <a:lstStyle/>
+                    <a:p>
+                      <a:r>
+                        <a:rPr sz="1200" b="1"/>
+                        <a:t>Fallback</a:t>
+                      </a:r>
+                    </a:p>
+                  </a:txBody>
+                  <a:tcPr/>
+                </a:tc>
+              </a:tr>
+              <a:tr h="365760">
+                <a:tc>
+                  <a:txBody>
+                    <a:bodyPr/>
+                    <a:lstStyle/>
+                    <a:p>
+                      <a:r>
+                        <a:rPr sz="1200"/>
+                        <a:t>UR30 RTDE packet lost</a:t>
+                      </a:r>
+                    </a:p>
+                  </a:txBody>
+                  <a:tcPr/>
+                </a:tc>
+                <a:tc>
+                  <a:txBody>
+                    <a:bodyPr/>
+                    <a:lstStyle/>
+                    <a:p>
+                      <a:r>
+                        <a:rPr sz="1200"/>
+                        <a:t>`watchdog.py` — 500 ms timeout</a:t>
+                      </a:r>
+                    </a:p>
+                  </a:txBody>
+                  <a:tcPr/>
+                </a:tc>
+                <a:tc>
+                  <a:txBody>
+                    <a:bodyPr/>
+                    <a:lstStyle/>
+                    <a:p>
+                      <a:r>
+                        <a:rPr sz="1200"/>
+                        <a:t>≤ 500 ms</a:t>
+                      </a:r>
+                    </a:p>
+                  </a:txBody>
+                  <a:tcPr/>
+                </a:tc>
+                <a:tc>
+                  <a:txBody>
+                    <a:bodyPr/>
+                    <a:lstStyle/>
+                    <a:p>
+                      <a:r>
+                        <a:rPr sz="1200"/>
+                        <a:t>stepper disabled, fault=1 → UR</a:t>
+                      </a:r>
+                    </a:p>
+                  </a:txBody>
+                  <a:tcPr/>
+                </a:tc>
+              </a:tr>
+              <a:tr h="365760">
+                <a:tc>
+                  <a:txBody>
+                    <a:bodyPr/>
+                    <a:lstStyle/>
+                    <a:p>
+                      <a:r>
+                        <a:rPr sz="1200"/>
+                        <a:t>Klippy socket closed</a:t>
+                      </a:r>
+                    </a:p>
+                  </a:txBody>
+                  <a:tcPr/>
+                </a:tc>
+                <a:tc>
+                  <a:txBody>
+                    <a:bodyPr/>
+                    <a:lstStyle/>
+                    <a:p>
+                      <a:r>
+                        <a:rPr sz="1200"/>
+                        <a:t>`klipper_client` reconnect loop</a:t>
+                      </a:r>
+                    </a:p>
+                  </a:txBody>
+                  <a:tcPr/>
+                </a:tc>
+                <a:tc>
+                  <a:txBody>
+                    <a:bodyPr/>
+                    <a:lstStyle/>
+                    <a:p>
+                      <a:r>
+                        <a:rPr sz="1200"/>
+                        <a:t>≤ 2 s</a:t>
+                      </a:r>
+                    </a:p>
+                  </a:txBody>
+                  <a:tcPr/>
+                </a:tc>
+                <a:tc>
+                  <a:txBody>
+                    <a:bodyPr/>
+                    <a:lstStyle/>
+                    <a:p>
+                      <a:r>
+                        <a:rPr sz="1200"/>
+                        <a:t>RECONNECTING state, exponential backoff</a:t>
+                      </a:r>
+                    </a:p>
+                  </a:txBody>
+                  <a:tcPr/>
+                </a:tc>
+              </a:tr>
+              <a:tr h="365760">
+                <a:tc>
+                  <a:txBody>
+                    <a:bodyPr/>
+                    <a:lstStyle/>
+                    <a:p>
+                      <a:r>
+                        <a:rPr sz="1200"/>
+                        <a:t>TMC2209 stall (pump blocked)</a:t>
+                      </a:r>
+                    </a:p>
+                  </a:txBody>
+                  <a:tcPr/>
+                </a:tc>
+                <a:tc>
+                  <a:txBody>
+                    <a:bodyPr/>
+                    <a:lstStyle/>
+                    <a:p>
+                      <a:r>
+                        <a:rPr sz="1200"/>
+                        <a:t>`stallguard_monitor` (Core1)</a:t>
+                      </a:r>
+                    </a:p>
+                  </a:txBody>
+                  <a:tcPr/>
+                </a:tc>
+                <a:tc>
+                  <a:txBody>
+                    <a:bodyPr/>
+                    <a:lstStyle/>
+                    <a:p>
+                      <a:r>
+                        <a:rPr sz="1200"/>
+                        <a:t>&lt; 1 ms hardware + 50 ms delivery</a:t>
+                      </a:r>
+                    </a:p>
+                  </a:txBody>
+                  <a:tcPr/>
+                </a:tc>
+                <a:tc>
+                  <a:txBody>
+                    <a:bodyPr/>
+                    <a:lstStyle/>
+                    <a:p>
+                      <a:r>
+                        <a:rPr sz="1200"/>
+                        <a:t>FAULT, error=stall → UR</a:t>
+                      </a:r>
+                    </a:p>
+                  </a:txBody>
+                  <a:tcPr/>
+                </a:tc>
+              </a:tr>
+              <a:tr h="365760">
+                <a:tc>
+                  <a:txBody>
+                    <a:bodyPr/>
+                    <a:lstStyle/>
+                    <a:p>
+                      <a:r>
+                        <a:rPr sz="1200"/>
+                        <a:t>TMC2209 thermal warning</a:t>
+                      </a:r>
+                    </a:p>
+                  </a:txBody>
+                  <a:tcPr/>
+                </a:tc>
+                <a:tc>
+                  <a:txBody>
+                    <a:bodyPr/>
+                    <a:lstStyle/>
+                    <a:p>
+                      <a:r>
+                        <a:rPr sz="1200"/>
+                        <a:t>`klipper_status` (20 Hz poll)</a:t>
+                      </a:r>
+                    </a:p>
+                  </a:txBody>
+                  <a:tcPr/>
+                </a:tc>
+                <a:tc>
+                  <a:txBody>
+                    <a:bodyPr/>
+                    <a:lstStyle/>
+                    <a:p>
+                      <a:r>
+                        <a:rPr sz="1200"/>
+                        <a:t>≤ 50 ms</a:t>
+                      </a:r>
+                    </a:p>
+                  </a:txBody>
+                  <a:tcPr/>
+                </a:tc>
+                <a:tc>
+                  <a:txBody>
+                    <a:bodyPr/>
+                    <a:lstStyle/>
+                    <a:p>
+                      <a:r>
+                        <a:rPr sz="1200"/>
+                        <a:t>disable motor, notify UR</a:t>
+                      </a:r>
+                    </a:p>
+                  </a:txBody>
+                  <a:tcPr/>
+                </a:tc>
+              </a:tr>
+              <a:tr h="365760">
+                <a:tc>
+                  <a:txBody>
+                    <a:bodyPr/>
+                    <a:lstStyle/>
+                    <a:p>
+                      <a:r>
+                        <a:rPr sz="1200"/>
+                        <a:t>24 V power droop</a:t>
+                      </a:r>
+                    </a:p>
+                  </a:txBody>
+                  <a:tcPr/>
+                </a:tc>
+                <a:tc>
+                  <a:txBody>
+                    <a:bodyPr/>
+                    <a:lstStyle/>
+                    <a:p>
+                      <a:r>
+                        <a:rPr sz="1200"/>
+                        <a:t>TVS + bulk cap absorb</a:t>
+                      </a:r>
+                    </a:p>
+                  </a:txBody>
+                  <a:tcPr/>
+                </a:tc>
+                <a:tc>
+                  <a:txBody>
+                    <a:bodyPr/>
+                    <a:lstStyle/>
+                    <a:p>
+                      <a:r>
+                        <a:rPr sz="1200"/>
+                        <a:t>µs</a:t>
+                      </a:r>
+                    </a:p>
+                  </a:txBody>
+                  <a:tcPr/>
+                </a:tc>
+                <a:tc>
+                  <a:txBody>
+                    <a:bodyPr/>
+                    <a:lstStyle/>
+                    <a:p>
+                      <a:r>
+                        <a:rPr sz="1200"/>
+                        <a:t>Pi5V buck brownout, systemd restart</a:t>
+                      </a:r>
+                    </a:p>
+                  </a:txBody>
+                  <a:tcPr/>
+                </a:tc>
+              </a:tr>
+              <a:tr h="365760">
+                <a:tc>
+                  <a:txBody>
+                    <a:bodyPr/>
+                    <a:lstStyle/>
+                    <a:p>
+                      <a:r>
+                        <a:rPr sz="1200"/>
+                        <a:t>SIGTERM / reboot</a:t>
+                      </a:r>
+                    </a:p>
+                  </a:txBody>
+                  <a:tcPr/>
+                </a:tc>
+                <a:tc>
+                  <a:txBody>
+                    <a:bodyPr/>
+                    <a:lstStyle/>
+                    <a:p>
+                      <a:r>
+                        <a:rPr sz="1200"/>
+                        <a:t>systemd + `ExecStop`</a:t>
+                      </a:r>
+                    </a:p>
+                  </a:txBody>
+                  <a:tcPr/>
+                </a:tc>
+                <a:tc>
+                  <a:txBody>
+                    <a:bodyPr/>
+                    <a:lstStyle/>
+                    <a:p>
+                      <a:r>
+                        <a:rPr sz="1200"/>
+                        <a:t>≤ 500 ms</a:t>
+                      </a:r>
+                    </a:p>
+                  </a:txBody>
+                  <a:tcPr/>
+                </a:tc>
+                <a:tc>
+                  <a:txBody>
+                    <a:bodyPr/>
+                    <a:lstStyle/>
+                    <a:p>
+                      <a:r>
+                        <a:rPr sz="1200"/>
+                        <a:t>G-code STEPPER off before exit</a:t>
+                      </a:r>
+                    </a:p>
+                  </a:txBody>
+                  <a:tcPr/>
+                </a:tc>
+              </a:tr>
+            </a:tbl>
+          </a:graphicData>
+        </a:graphic>
+      </p:graphicFrame>
     </p:spTree>
   </p:cSld>
   <p:clrMapOvr>
@@ -7084,7 +8038,7 @@
 </p:sld>
 </file>
 
-<file path=ppt/slides/slide2.xml><?xml version="1.0" encoding="utf-8"?>
+<file path=ppt/slides/slide22.xml><?xml version="1.0" encoding="utf-8"?>
 <p:sld xmlns:a="http://schemas.openxmlformats.org/drawingml/2006/main" xmlns:p="http://schemas.openxmlformats.org/presentationml/2006/main" xmlns:r="http://schemas.openxmlformats.org/officeDocument/2006/relationships">
   <p:cSld>
     <p:spTree>
@@ -7111,7 +8065,7 @@
           <a:p>
             <a:r>
               <a:rPr sz="3200" b="1"/>
-              <a:t>The Need</a:t>
+              <a:t>Backup: RTDE Register Map</a:t>
             </a:r>
           </a:p>
         </p:txBody>
@@ -7138,42 +8092,80 @@
           </a:bodyPr>
           <a:lstStyle/>
           <a:p>
+            <a:pPr/>
+            <a:r>
+              <a:rPr b="1" sz="1800"/>
+              <a:t>UR30 → Pi (output)</a:t>
+            </a:r>
+          </a:p>
+          <a:p>
+            <a:pPr/>
+            <a:r>
+              <a:rPr b="1" sz="1800"/>
+              <a:t>Pi → UR30 (input)</a:t>
+            </a:r>
+          </a:p>
+          <a:p>
+            <a:pPr/>
+            <a:r>
+              <a:rPr sz="1800"/>
+              <a:t>Reserved: StallGuard load, driver temperature, position target</a:t>
+            </a:r>
+          </a:p>
+          <a:p>
             <a:pPr lvl="1"/>
             <a:r>
               <a:rPr sz="1800"/>
-              <a:t>UR30 collaborative robot — no native mechanism for an external coordinated motion axis</a:t>
+              <a:t>`output_int_register_0` — extrusion mode (0/1/2)</a:t>
             </a:r>
           </a:p>
           <a:p>
             <a:pPr lvl="1"/>
             <a:r>
               <a:rPr sz="1800"/>
-              <a:t>Metal-paste additive manufacturing requires a pump synchronized to TCP velocity</a:t>
+              <a:t>`output_double_register_0` — commanded rate (mm/s)</a:t>
             </a:r>
           </a:p>
           <a:p>
             <a:pPr lvl="1"/>
             <a:r>
               <a:rPr sz="1800"/>
-              <a:t>Commercial UR+ accessories: expensive, proprietary, not tuned for paste</a:t>
+              <a:t>`output_double_register_1` — TCP speed (mm/s)</a:t>
             </a:r>
           </a:p>
           <a:p>
             <a:pPr lvl="1"/>
             <a:r>
               <a:rPr sz="1800"/>
-              <a:t>Digital I/O alternative: on/off only — no speed synchronization</a:t>
+              <a:t>`output_bit_register_64/65/66` — enable / e-stop / home</a:t>
             </a:r>
           </a:p>
           <a:p>
             <a:pPr lvl="1"/>
             <a:r>
-              <a:rPr b="1" sz="1800"/>
-              <a:t>Goal:</a:t>
-            </a:r>
-            <a:r>
-              <a:rPr sz="1800"/>
-              <a:t> external stepper axis that takes commands from the UR30 controller in real time, dispenses metal paste, reports status</a:t>
+              <a:rPr sz="1800"/>
+              <a:t>`input_int_register_0` — status (0 idle / 1 running / 2 error / 3 homing)</a:t>
+            </a:r>
+          </a:p>
+          <a:p>
+            <a:pPr lvl="1"/>
+            <a:r>
+              <a:rPr sz="1800"/>
+              <a:t>`input_int_register_1` — error code (0/1/2/3)</a:t>
+            </a:r>
+          </a:p>
+          <a:p>
+            <a:pPr lvl="1"/>
+            <a:r>
+              <a:rPr sz="1800"/>
+              <a:t>`input_double_register_0` — actual rate (mm/s)</a:t>
+            </a:r>
+          </a:p>
+          <a:p>
+            <a:pPr lvl="1"/>
+            <a:r>
+              <a:rPr sz="1800"/>
+              <a:t>`input_bit_register_64/65` — ready / fault</a:t>
             </a:r>
           </a:p>
         </p:txBody>

--- a/reports/turn-in/presentation/presentation.pptx
+++ b/reports/turn-in/presentation/presentation.pptx
@@ -873,7 +873,7 @@
           <a:lstStyle/>
           <a:p>
             <a:r>
-              <a:t>Placeholder slide — the two PNGs from scripts/report_figures.py drop in here after Wednesday's bringup. Target layout is two figures side-by-side, bullets summarizing below. If latency misses spec, own it; Phase 4 is about learning what the real system does, not ratifying the prediction.</a:t>
+              <a:t>This is the milestone slide. Land the RTDE trace numbers — the audience sees the bridge saw the commanded rate ramp, the motor moved, the system completed cleanly. The quantitative latency/accuracy plots are deferred to a clean CSV capture run; that's honest Phase 4 status, not a hole.</a:t>
             </a:r>
           </a:p>
         </p:txBody>
@@ -5790,78 +5790,95 @@
           </a:bodyPr>
           <a:lstStyle/>
           <a:p>
+            <a:pPr/>
+            <a:r>
+              <a:rPr b="1" sz="1800"/>
+              <a:t>First end-to-end motor spin achieved 2026-04-22</a:t>
+            </a:r>
+            <a:r>
+              <a:rPr sz="1800"/>
+              <a:t> — URScript drives the pump shaft through the full chain.</a:t>
+            </a:r>
+          </a:p>
+          <a:p>
+            <a:pPr/>
+            <a:r>
+              <a:rPr sz="1800"/>
+              <a:t>RTDE register trace captured live during the spin (bridge at `192.168.0.4` polling UR30 at `192.168.0.3`):</a:t>
+            </a:r>
+          </a:p>
+          <a:p>
+            <a:pPr/>
+            <a:r>
+              <a:rPr sz="1800"/>
+              <a:t>```</a:t>
+            </a:r>
+          </a:p>
+          <a:p>
+            <a:pPr/>
+            <a:r>
+              <a:rPr sz="1800"/>
+              <a:t>t = 0.0 s   mode = 0   rate = 0.000 mm/s    (idle)</a:t>
+            </a:r>
+          </a:p>
+          <a:p>
+            <a:pPr/>
+            <a:r>
+              <a:rPr sz="1800"/>
+              <a:t>t = 1.2 s   mode = 1   rate = 0.200 mm/s    ┐</a:t>
+            </a:r>
+          </a:p>
+          <a:p>
+            <a:pPr/>
+            <a:r>
+              <a:rPr sz="1800"/>
+              <a:t>t = 2.1 s   mode = 1   rate = 2.000 mm/s    │ ramp 0 → 4 mm/s over 2 s</a:t>
+            </a:r>
+          </a:p>
+          <a:p>
+            <a:pPr/>
+            <a:r>
+              <a:rPr sz="1800"/>
+              <a:t>t = 3.1 s   mode = 1   rate = 4.000 mm/s    ┘</a:t>
+            </a:r>
+          </a:p>
+          <a:p>
+            <a:pPr/>
+            <a:r>
+              <a:rPr sz="1800"/>
+              <a:t>(hold 5 s at 4 mm/s — motor rotating visibly)</a:t>
+            </a:r>
+          </a:p>
+          <a:p>
+            <a:pPr/>
+            <a:r>
+              <a:rPr sz="1800"/>
+              <a:t>t = 8.2 s   mode = 0   rate = 0.000 mm/s    (disengaged, clean return)</a:t>
+            </a:r>
+          </a:p>
+          <a:p>
+            <a:pPr/>
+            <a:r>
+              <a:rPr sz="1800"/>
+              <a:t>```</a:t>
+            </a:r>
+          </a:p>
+          <a:p>
+            <a:pPr/>
+            <a:r>
+              <a:rPr sz="1800"/>
+              <a:t>Klipper's `print_time` advanced ~45 s of MANUAL_STEPPER moves; `buffer_time` peaked at 9.7 s then drained cleanly. No bridge errors.</a:t>
+            </a:r>
+          </a:p>
+          <a:p>
             <a:pPr lvl="1"/>
             <a:r>
               <a:rPr b="1" sz="1800"/>
-              <a:t>Figure 8 (left):</a:t>
-            </a:r>
-            <a:r>
-              <a:rPr sz="1800"/>
-              <a:t> predicted vs measured latency per signal-path segment — bar chart from `scripts/report_figures.py --csv &lt;bringup.csv&gt;`</a:t>
-            </a:r>
-          </a:p>
-          <a:p>
-            <a:pPr lvl="1"/>
-            <a:r>
-              <a:rPr b="1" sz="1800"/>
-              <a:t>Figure 10 (right):</a:t>
-            </a:r>
-            <a:r>
-              <a:rPr sz="1800"/>
-              <a:t> commanded vs measured extrusion rate over a 30 s run at 5 / 10 / 25 / 50 mm/s — with ±2 % spec band shaded</a:t>
-            </a:r>
-          </a:p>
-          <a:p>
-            <a:pPr lvl="1"/>
-            <a:r>
-              <a:rPr sz="1800"/>
-              <a:t>Key numbers to recite:</a:t>
-            </a:r>
-          </a:p>
-          <a:p>
-            <a:pPr lvl="1"/>
-            <a:r>
-              <a:rPr sz="1800"/>
-              <a:t>End-to-end latency: p50 = </a:t>
-            </a:r>
-            <a:r>
-              <a:rPr b="1" sz="1800"/>
-              <a:t>[TBD from Wed data]</a:t>
-            </a:r>
-            <a:r>
-              <a:rPr sz="1800"/>
-              <a:t>, p99 = </a:t>
-            </a:r>
-            <a:r>
-              <a:rPr b="1" sz="1800"/>
-              <a:t>[TBD]</a:t>
-            </a:r>
-            <a:r>
-              <a:rPr sz="1800"/>
-              <a:t> (target &lt; 20 ms)</a:t>
-            </a:r>
-          </a:p>
-          <a:p>
-            <a:pPr lvl="1"/>
-            <a:r>
-              <a:rPr sz="1800"/>
-              <a:t>Steady-state accuracy: mean |err| = </a:t>
-            </a:r>
-            <a:r>
-              <a:rPr b="1" sz="1800"/>
-              <a:t>[TBD]</a:t>
-            </a:r>
-            <a:r>
-              <a:rPr sz="1800"/>
-              <a:t> %, p95 = </a:t>
-            </a:r>
-            <a:r>
-              <a:rPr b="1" sz="1800"/>
-              <a:t>[TBD]</a:t>
-            </a:r>
-            <a:r>
-              <a:rPr sz="1800"/>
-              <a:t> % (target &lt; 5 %)</a:t>
+              <a:t>Quantitative latency + accuracy capture deferred</a:t>
+            </a:r>
+            <a:r>
+              <a:rPr sz="1800"/>
+              <a:t> to a follow-on CSV run; the Figure 8 / 10 bar charts and scatter are blocked on that data.</a:t>
             </a:r>
           </a:p>
         </p:txBody>
@@ -7622,6 +7639,39 @@
               <a:t> the stepper is off by default — every non-idle state is an explicit positive command. A lost connection cannot leave the motor running.</a:t>
             </a:r>
           </a:p>
+          <a:p>
+            <a:pPr/>
+            <a:r>
+              <a:rPr b="1" sz="1800"/>
+              <a:t>Real-world gotchas actually hit during 2026-04-22 bring-up</a:t>
+            </a:r>
+            <a:r>
+              <a:rPr sz="1800"/>
+              <a:t> (now documented):</a:t>
+            </a:r>
+          </a:p>
+          <a:p>
+            <a:pPr lvl="1"/>
+            <a:r>
+              <a:rPr b="1" sz="1800"/>
+              <a:t>UR30 inbound-access whitelist</a:t>
+            </a:r>
+            <a:r>
+              <a:rPr sz="1800"/>
+              <a:t> → Pi must use the allow-listed IP (`.4/32`); ICMP passes through but TCP to 29999/30001–30004 silently drops from other IPs.</a:t>
+            </a:r>
+          </a:p>
+          <a:p>
+            <a:pPr lvl="1"/>
+            <a:r>
+              <a:rPr b="1" sz="1800"/>
+              <a:t>URScript top-level assignments</a:t>
+            </a:r>
+            <a:r>
+              <a:rPr sz="1800"/>
+              <a:t> → Secondary Interface (port 30002) silently rejects scripts with bare `X = 5` lines outside a `def`. Fix: put everything inside a function and call it at the end.</a:t>
+            </a:r>
+          </a:p>
         </p:txBody>
       </p:sp>
       <p:graphicFrame>
@@ -8109,63 +8159,56 @@
             <a:pPr/>
             <a:r>
               <a:rPr sz="1800"/>
-              <a:t>Reserved: StallGuard load, driver temperature, position target</a:t>
+              <a:t>`ur-rtde` restricts int/double indices to `[12,19]` outbound and `[18,22]` inbound; bit registers are not exposed through the Python bindings, so motion is gated on `mode != 0` (plus watchdog + pendant E-stop) rather than an enable bit.</a:t>
             </a:r>
           </a:p>
           <a:p>
             <a:pPr lvl="1"/>
             <a:r>
               <a:rPr sz="1800"/>
-              <a:t>`output_int_register_0` — extrusion mode (0/1/2)</a:t>
+              <a:t>`output_int_register_12` — extrusion mode (0/1/2)</a:t>
             </a:r>
           </a:p>
           <a:p>
             <a:pPr lvl="1"/>
             <a:r>
               <a:rPr sz="1800"/>
-              <a:t>`output_double_register_0` — commanded rate (mm/s)</a:t>
+              <a:t>`output_double_register_12` — commanded rate (mm/s)</a:t>
             </a:r>
           </a:p>
           <a:p>
             <a:pPr lvl="1"/>
             <a:r>
               <a:rPr sz="1800"/>
-              <a:t>`output_double_register_1` — TCP speed (mm/s)</a:t>
+              <a:t>`output_double_register_13` — TCP speed (mm/s)</a:t>
             </a:r>
           </a:p>
           <a:p>
             <a:pPr lvl="1"/>
             <a:r>
               <a:rPr sz="1800"/>
-              <a:t>`output_bit_register_64/65/66` — enable / e-stop / home</a:t>
+              <a:t>`input_int_register_18` — status (0 idle / 1 running / 2 error / 3 homing)</a:t>
             </a:r>
           </a:p>
           <a:p>
             <a:pPr lvl="1"/>
             <a:r>
               <a:rPr sz="1800"/>
-              <a:t>`input_int_register_0` — status (0 idle / 1 running / 2 error / 3 homing)</a:t>
+              <a:t>`input_int_register_19` — error code (0/1/2/3)</a:t>
             </a:r>
           </a:p>
           <a:p>
             <a:pPr lvl="1"/>
             <a:r>
               <a:rPr sz="1800"/>
-              <a:t>`input_int_register_1` — error code (0/1/2/3)</a:t>
+              <a:t>`input_double_register_18` — actual rate (mm/s)</a:t>
             </a:r>
           </a:p>
           <a:p>
             <a:pPr lvl="1"/>
             <a:r>
               <a:rPr sz="1800"/>
-              <a:t>`input_double_register_0` — actual rate (mm/s)</a:t>
-            </a:r>
-          </a:p>
-          <a:p>
-            <a:pPr lvl="1"/>
-            <a:r>
-              <a:rPr sz="1800"/>
-              <a:t>`input_bit_register_64/65` — ready / fault</a:t>
+              <a:t>`input_double_register_19` — StallGuard load (0–255, lower = higher load)</a:t>
             </a:r>
           </a:p>
         </p:txBody>
@@ -8976,7 +9019,7 @@
             </a:r>
             <a:r>
               <a:rPr sz="1800"/>
-              <a:t> URScript on teach pendant writes 6 RTDE output registers</a:t>
+              <a:t> URScript on teach pendant writes RTDE output registers (int 12, doubles 12/13)</a:t>
             </a:r>
           </a:p>
           <a:p>
@@ -9009,7 +9052,18 @@
             </a:r>
             <a:r>
               <a:rPr sz="1800"/>
-              <a:t> 5 RTDE input registers (status, error code, actual rate, ready, fault)</a:t>
+              <a:t> RTDE input registers (status, error code, actual rate, StallGuard load)</a:t>
+            </a:r>
+          </a:p>
+          <a:p>
+            <a:pPr lvl="1"/>
+            <a:r>
+              <a:rPr b="1" sz="1800"/>
+              <a:t>Lab network:</a:t>
+            </a:r>
+            <a:r>
+              <a:rPr sz="1800"/>
+              <a:t> unmanaged gigabit switch (L2 only, no DHCP / no router); static IPs; UR30 inbound whitelist at `.4/32` forces Pi to `192.168.0.4`</a:t>
             </a:r>
           </a:p>
           <a:p>
